--- a/Cloud Computing Final Presentation.pptx
+++ b/Cloud Computing Final Presentation.pptx
@@ -272,127 +272,6 @@
     <p1510:client id="{AA245384-212A-4D10-8D64-0402729215DD}" v="4" dt="2025-04-09T20:33:55.426"/>
   </p1510:revLst>
 </p1510:revInfo>
-</file>
-
-<file path=ppt/changesInfos/changesInfo1.xml><?xml version="1.0" encoding="utf-8"?>
-<pc:chgInfo xmlns:a="http://schemas.openxmlformats.org/drawingml/2006/main" xmlns:r="http://schemas.openxmlformats.org/officeDocument/2006/relationships" xmlns:ac="http://schemas.microsoft.com/office/drawing/2013/main/command" xmlns:pc="http://schemas.microsoft.com/office/powerpoint/2013/main/command">
-  <pc:docChgLst>
-    <pc:chgData name="Crystal Kao" userId="83a127c155295ab2" providerId="LiveId" clId="{AA245384-212A-4D10-8D64-0402729215DD}"/>
-    <pc:docChg chg="undo custSel addSld modSld">
-      <pc:chgData name="Crystal Kao" userId="83a127c155295ab2" providerId="LiveId" clId="{AA245384-212A-4D10-8D64-0402729215DD}" dt="2025-04-09T20:37:12.469" v="366" actId="20577"/>
-      <pc:docMkLst>
-        <pc:docMk/>
-      </pc:docMkLst>
-      <pc:sldChg chg="modSp mod">
-        <pc:chgData name="Crystal Kao" userId="83a127c155295ab2" providerId="LiveId" clId="{AA245384-212A-4D10-8D64-0402729215DD}" dt="2025-04-09T20:28:53.876" v="26" actId="20577"/>
-        <pc:sldMkLst>
-          <pc:docMk/>
-          <pc:sldMk cId="0" sldId="257"/>
-        </pc:sldMkLst>
-        <pc:spChg chg="mod">
-          <ac:chgData name="Crystal Kao" userId="83a127c155295ab2" providerId="LiveId" clId="{AA245384-212A-4D10-8D64-0402729215DD}" dt="2025-04-09T20:28:53.876" v="26" actId="20577"/>
-          <ac:spMkLst>
-            <pc:docMk/>
-            <pc:sldMk cId="0" sldId="257"/>
-            <ac:spMk id="61" creationId="{00000000-0000-0000-0000-000000000000}"/>
-          </ac:spMkLst>
-        </pc:spChg>
-      </pc:sldChg>
-      <pc:sldChg chg="modSp mod">
-        <pc:chgData name="Crystal Kao" userId="83a127c155295ab2" providerId="LiveId" clId="{AA245384-212A-4D10-8D64-0402729215DD}" dt="2025-04-09T20:33:44.783" v="219" actId="27636"/>
-        <pc:sldMkLst>
-          <pc:docMk/>
-          <pc:sldMk cId="0" sldId="258"/>
-        </pc:sldMkLst>
-        <pc:spChg chg="mod">
-          <ac:chgData name="Crystal Kao" userId="83a127c155295ab2" providerId="LiveId" clId="{AA245384-212A-4D10-8D64-0402729215DD}" dt="2025-04-09T20:33:44.783" v="219" actId="27636"/>
-          <ac:spMkLst>
-            <pc:docMk/>
-            <pc:sldMk cId="0" sldId="258"/>
-            <ac:spMk id="67" creationId="{00000000-0000-0000-0000-000000000000}"/>
-          </ac:spMkLst>
-        </pc:spChg>
-      </pc:sldChg>
-      <pc:sldChg chg="modSp mod">
-        <pc:chgData name="Crystal Kao" userId="83a127c155295ab2" providerId="LiveId" clId="{AA245384-212A-4D10-8D64-0402729215DD}" dt="2025-04-09T20:33:44.809" v="220" actId="27636"/>
-        <pc:sldMkLst>
-          <pc:docMk/>
-          <pc:sldMk cId="0" sldId="259"/>
-        </pc:sldMkLst>
-        <pc:spChg chg="mod">
-          <ac:chgData name="Crystal Kao" userId="83a127c155295ab2" providerId="LiveId" clId="{AA245384-212A-4D10-8D64-0402729215DD}" dt="2025-04-09T20:33:44.809" v="220" actId="27636"/>
-          <ac:spMkLst>
-            <pc:docMk/>
-            <pc:sldMk cId="0" sldId="259"/>
-            <ac:spMk id="78" creationId="{00000000-0000-0000-0000-000000000000}"/>
-          </ac:spMkLst>
-        </pc:spChg>
-      </pc:sldChg>
-      <pc:sldChg chg="addSp delSp modSp mod">
-        <pc:chgData name="Crystal Kao" userId="83a127c155295ab2" providerId="LiveId" clId="{AA245384-212A-4D10-8D64-0402729215DD}" dt="2025-04-09T20:37:12.469" v="366" actId="20577"/>
-        <pc:sldMkLst>
-          <pc:docMk/>
-          <pc:sldMk cId="0" sldId="261"/>
-        </pc:sldMkLst>
-        <pc:spChg chg="add del mod">
-          <ac:chgData name="Crystal Kao" userId="83a127c155295ab2" providerId="LiveId" clId="{AA245384-212A-4D10-8D64-0402729215DD}" dt="2025-04-09T20:36:40.264" v="363" actId="478"/>
-          <ac:spMkLst>
-            <pc:docMk/>
-            <pc:sldMk cId="0" sldId="261"/>
-            <ac:spMk id="3" creationId="{63340AAE-DE70-0A36-23FD-B5A8DFDE071D}"/>
-          </ac:spMkLst>
-        </pc:spChg>
-        <pc:spChg chg="add del">
-          <ac:chgData name="Crystal Kao" userId="83a127c155295ab2" providerId="LiveId" clId="{AA245384-212A-4D10-8D64-0402729215DD}" dt="2025-04-09T20:34:33.156" v="225" actId="22"/>
-          <ac:spMkLst>
-            <pc:docMk/>
-            <pc:sldMk cId="0" sldId="261"/>
-            <ac:spMk id="5" creationId="{A22B243E-01C3-583D-FF5A-9921F7BC817C}"/>
-          </ac:spMkLst>
-        </pc:spChg>
-        <pc:spChg chg="mod">
-          <ac:chgData name="Crystal Kao" userId="83a127c155295ab2" providerId="LiveId" clId="{AA245384-212A-4D10-8D64-0402729215DD}" dt="2025-04-09T20:32:11.349" v="83" actId="20577"/>
-          <ac:spMkLst>
-            <pc:docMk/>
-            <pc:sldMk cId="0" sldId="261"/>
-            <ac:spMk id="105" creationId="{00000000-0000-0000-0000-000000000000}"/>
-          </ac:spMkLst>
-        </pc:spChg>
-        <pc:spChg chg="mod">
-          <ac:chgData name="Crystal Kao" userId="83a127c155295ab2" providerId="LiveId" clId="{AA245384-212A-4D10-8D64-0402729215DD}" dt="2025-04-09T20:37:12.469" v="366" actId="20577"/>
-          <ac:spMkLst>
-            <pc:docMk/>
-            <pc:sldMk cId="0" sldId="261"/>
-            <ac:spMk id="106" creationId="{00000000-0000-0000-0000-000000000000}"/>
-          </ac:spMkLst>
-        </pc:spChg>
-        <pc:graphicFrameChg chg="add mod modGraphic">
-          <ac:chgData name="Crystal Kao" userId="83a127c155295ab2" providerId="LiveId" clId="{AA245384-212A-4D10-8D64-0402729215DD}" dt="2025-04-09T20:36:58.250" v="365" actId="12385"/>
-          <ac:graphicFrameMkLst>
-            <pc:docMk/>
-            <pc:sldMk cId="0" sldId="261"/>
-            <ac:graphicFrameMk id="6" creationId="{2A5584BC-3CEA-F507-F586-FB25B1873C4F}"/>
-          </ac:graphicFrameMkLst>
-        </pc:graphicFrameChg>
-      </pc:sldChg>
-      <pc:sldChg chg="modSp new mod">
-        <pc:chgData name="Crystal Kao" userId="83a127c155295ab2" providerId="LiveId" clId="{AA245384-212A-4D10-8D64-0402729215DD}" dt="2025-04-09T20:30:17.979" v="55" actId="20577"/>
-        <pc:sldMkLst>
-          <pc:docMk/>
-          <pc:sldMk cId="3483925133" sldId="262"/>
-        </pc:sldMkLst>
-        <pc:spChg chg="mod">
-          <ac:chgData name="Crystal Kao" userId="83a127c155295ab2" providerId="LiveId" clId="{AA245384-212A-4D10-8D64-0402729215DD}" dt="2025-04-09T20:30:17.979" v="55" actId="20577"/>
-          <ac:spMkLst>
-            <pc:docMk/>
-            <pc:sldMk cId="3483925133" sldId="262"/>
-            <ac:spMk id="2" creationId="{01CCE7D1-2828-4B44-81B4-12073A5FA44C}"/>
-          </ac:spMkLst>
-        </pc:spChg>
-      </pc:sldChg>
-    </pc:docChg>
-  </pc:docChgLst>
-</pc:chgInfo>
 </file>
 
 <file path=ppt/notesMasters/notesMaster1.xml><?xml version="1.0" encoding="utf-8"?>
@@ -1281,7 +1160,7 @@
         </p:nvSpPr>
         <p:spPr>
           <a:xfrm>
-            <a:off x="381300" y="685800"/>
+            <a:off x="381000" y="685800"/>
             <a:ext cx="6096000" cy="3429000"/>
           </a:xfrm>
           <a:custGeom>
@@ -7063,7 +6942,7 @@
         </p:spPr>
         <p:txBody>
           <a:bodyPr spcFirstLastPara="1" wrap="square" lIns="91425" tIns="91425" rIns="91425" bIns="91425" anchor="t" anchorCtr="0">
-            <a:normAutofit fontScale="92500"/>
+            <a:normAutofit/>
           </a:bodyPr>
           <a:lstStyle/>
           <a:p>
@@ -7078,10 +6957,10 @@
               <a:buChar char="-"/>
             </a:pPr>
             <a:r>
-              <a:rPr lang="en"/>
+              <a:rPr lang="en" dirty="0"/>
               <a:t>S3 Bucket</a:t>
             </a:r>
-            <a:endParaRPr/>
+            <a:endParaRPr dirty="0"/>
           </a:p>
           <a:p>
             <a:pPr marL="914400" lvl="1" indent="-317500" algn="l" rtl="0">
@@ -7095,10 +6974,10 @@
               <a:buChar char="-"/>
             </a:pPr>
             <a:r>
-              <a:rPr lang="en"/>
+              <a:rPr lang="en" dirty="0"/>
               <a:t>Store data in buckets</a:t>
             </a:r>
-            <a:endParaRPr/>
+            <a:endParaRPr dirty="0"/>
           </a:p>
           <a:p>
             <a:pPr marL="914400" lvl="1" indent="-317500" algn="l" rtl="0">
@@ -7112,10 +6991,10 @@
               <a:buChar char="-"/>
             </a:pPr>
             <a:r>
-              <a:rPr lang="en"/>
+              <a:rPr lang="en" dirty="0"/>
               <a:t>Create static website to display findings in one place</a:t>
             </a:r>
-            <a:endParaRPr/>
+            <a:endParaRPr dirty="0"/>
           </a:p>
           <a:p>
             <a:pPr marL="457200" lvl="0" indent="-342900" algn="l" rtl="0">
@@ -7129,10 +7008,10 @@
               <a:buChar char="-"/>
             </a:pPr>
             <a:r>
-              <a:rPr lang="en"/>
+              <a:rPr lang="en" dirty="0"/>
               <a:t>VPC</a:t>
             </a:r>
-            <a:endParaRPr/>
+            <a:endParaRPr dirty="0"/>
           </a:p>
           <a:p>
             <a:pPr marL="914400" lvl="1" indent="-317500" algn="l" rtl="0">
@@ -7146,10 +7025,10 @@
               <a:buChar char="-"/>
             </a:pPr>
             <a:r>
-              <a:rPr lang="en"/>
+              <a:rPr lang="en" dirty="0"/>
               <a:t>Create internet gateways, subnets, and routing tables for EC2 instances</a:t>
             </a:r>
-            <a:endParaRPr/>
+            <a:endParaRPr dirty="0"/>
           </a:p>
           <a:p>
             <a:pPr marL="457200" lvl="0" indent="-342900" algn="l" rtl="0">
@@ -7163,10 +7042,10 @@
               <a:buChar char="-"/>
             </a:pPr>
             <a:r>
-              <a:rPr lang="en"/>
+              <a:rPr lang="en" dirty="0"/>
               <a:t>EC2</a:t>
             </a:r>
-            <a:endParaRPr/>
+            <a:endParaRPr dirty="0"/>
           </a:p>
           <a:p>
             <a:pPr marL="914400" lvl="1" indent="-317500" algn="l" rtl="0">
@@ -7180,10 +7059,10 @@
               <a:buChar char="-"/>
             </a:pPr>
             <a:r>
-              <a:rPr lang="en"/>
+              <a:rPr lang="en" dirty="0"/>
               <a:t>Create instances from computing sources in the cloud</a:t>
             </a:r>
-            <a:endParaRPr/>
+            <a:endParaRPr dirty="0"/>
           </a:p>
           <a:p>
             <a:pPr marL="914400" lvl="1" indent="-317500" algn="l" rtl="0">
@@ -7197,10 +7076,18 @@
               <a:buChar char="-"/>
             </a:pPr>
             <a:r>
-              <a:rPr lang="en"/>
-              <a:t>Run a Jupyter Notebook or Python file to preprocess data</a:t>
+              <a:rPr lang="en" dirty="0"/>
+              <a:t>Run a </a:t>
             </a:r>
-            <a:endParaRPr/>
+            <a:r>
+              <a:rPr lang="en" dirty="0" err="1"/>
+              <a:t>Jupyter</a:t>
+            </a:r>
+            <a:r>
+              <a:rPr lang="en" dirty="0"/>
+              <a:t> Notebook or Python file to preprocess data</a:t>
+            </a:r>
+            <a:endParaRPr dirty="0"/>
           </a:p>
           <a:p>
             <a:pPr marL="457200" lvl="0" indent="-342900" algn="l" rtl="0">
@@ -7214,10 +7101,10 @@
               <a:buChar char="-"/>
             </a:pPr>
             <a:r>
-              <a:rPr lang="en"/>
-              <a:t>IAM</a:t>
+              <a:rPr lang="en" dirty="0" err="1"/>
+              <a:t>QuickSight</a:t>
             </a:r>
-            <a:endParaRPr/>
+            <a:endParaRPr dirty="0"/>
           </a:p>
           <a:p>
             <a:pPr marL="914400" lvl="1" indent="-317500" algn="l" rtl="0">
@@ -7231,10 +7118,10 @@
               <a:buChar char="-"/>
             </a:pPr>
             <a:r>
-              <a:rPr lang="en"/>
-              <a:t>Control access to S3 bucket, QuickSight</a:t>
+              <a:rPr lang="en" dirty="0"/>
+              <a:t>Connect with data from S3 bucket to create dashboards</a:t>
             </a:r>
-            <a:endParaRPr/>
+            <a:endParaRPr dirty="0"/>
           </a:p>
           <a:p>
             <a:pPr marL="914400" lvl="1" indent="-317500" algn="l" rtl="0">
@@ -7248,78 +7135,10 @@
               <a:buChar char="-"/>
             </a:pPr>
             <a:r>
-              <a:rPr lang="en"/>
-              <a:t>Define IAM roles with specific permissions for different jobs</a:t>
-            </a:r>
-            <a:endParaRPr/>
-          </a:p>
-          <a:p>
-            <a:pPr marL="914400" lvl="1" indent="-317500" algn="l" rtl="0">
-              <a:spcBef>
-                <a:spcPts val="0"/>
-              </a:spcBef>
-              <a:spcAft>
-                <a:spcPts val="0"/>
-              </a:spcAft>
-              <a:buSzPts val="1400"/>
-              <a:buChar char="-"/>
-            </a:pPr>
-            <a:r>
-              <a:rPr lang="en"/>
-              <a:t>Set up billing alert and monitoring budgets</a:t>
-            </a:r>
-            <a:endParaRPr/>
-          </a:p>
-          <a:p>
-            <a:pPr marL="457200" lvl="0" indent="-342900" algn="l" rtl="0">
-              <a:spcBef>
-                <a:spcPts val="0"/>
-              </a:spcBef>
-              <a:spcAft>
-                <a:spcPts val="0"/>
-              </a:spcAft>
-              <a:buSzPts val="1800"/>
-              <a:buChar char="-"/>
-            </a:pPr>
-            <a:r>
-              <a:rPr lang="en"/>
-              <a:t>QuickSight</a:t>
-            </a:r>
-            <a:endParaRPr/>
-          </a:p>
-          <a:p>
-            <a:pPr marL="914400" lvl="1" indent="-317500" algn="l" rtl="0">
-              <a:spcBef>
-                <a:spcPts val="0"/>
-              </a:spcBef>
-              <a:spcAft>
-                <a:spcPts val="0"/>
-              </a:spcAft>
-              <a:buSzPts val="1400"/>
-              <a:buChar char="-"/>
-            </a:pPr>
-            <a:r>
-              <a:rPr lang="en"/>
-              <a:t>Connect with data from S3 bucket to create dashboards</a:t>
-            </a:r>
-            <a:endParaRPr/>
-          </a:p>
-          <a:p>
-            <a:pPr marL="914400" lvl="1" indent="-317500" algn="l" rtl="0">
-              <a:spcBef>
-                <a:spcPts val="0"/>
-              </a:spcBef>
-              <a:spcAft>
-                <a:spcPts val="0"/>
-              </a:spcAft>
-              <a:buSzPts val="1400"/>
-              <a:buChar char="-"/>
-            </a:pPr>
-            <a:r>
-              <a:rPr lang="en"/>
+              <a:rPr lang="en" dirty="0"/>
               <a:t>Create histogram to show the distribution of salaries</a:t>
             </a:r>
-            <a:endParaRPr/>
+            <a:endParaRPr dirty="0"/>
           </a:p>
         </p:txBody>
       </p:sp>
@@ -7508,56 +7327,6 @@
       </p:cxnSp>
       <p:sp>
         <p:nvSpPr>
-          <p:cNvPr id="87" name="Google Shape;87;p17"/>
-          <p:cNvSpPr txBox="1"/>
-          <p:nvPr/>
-        </p:nvSpPr>
-        <p:spPr>
-          <a:xfrm>
-            <a:off x="4157663" y="2670463"/>
-            <a:ext cx="593700" cy="381300"/>
-          </a:xfrm>
-          <a:prstGeom prst="rect">
-            <a:avLst/>
-          </a:prstGeom>
-          <a:noFill/>
-          <a:ln>
-            <a:noFill/>
-          </a:ln>
-        </p:spPr>
-        <p:txBody>
-          <a:bodyPr spcFirstLastPara="1" wrap="square" lIns="91425" tIns="91425" rIns="91425" bIns="91425" anchor="t" anchorCtr="0">
-            <a:noAutofit/>
-          </a:bodyPr>
-          <a:lstStyle/>
-          <a:p>
-            <a:pPr marL="0" lvl="0" indent="0" algn="l" rtl="0">
-              <a:spcBef>
-                <a:spcPts val="0"/>
-              </a:spcBef>
-              <a:spcAft>
-                <a:spcPts val="0"/>
-              </a:spcAft>
-              <a:buNone/>
-            </a:pPr>
-            <a:r>
-              <a:rPr lang="en" sz="1800">
-                <a:solidFill>
-                  <a:schemeClr val="dk2"/>
-                </a:solidFill>
-              </a:rPr>
-              <a:t>IAM</a:t>
-            </a:r>
-            <a:endParaRPr sz="1800">
-              <a:solidFill>
-                <a:schemeClr val="dk2"/>
-              </a:solidFill>
-            </a:endParaRPr>
-          </a:p>
-        </p:txBody>
-      </p:sp>
-      <p:sp>
-        <p:nvSpPr>
           <p:cNvPr id="88" name="Google Shape;88;p17"/>
           <p:cNvSpPr txBox="1"/>
           <p:nvPr/>
@@ -8172,15 +7941,16 @@
         <p:nvCxnSpPr>
           <p:cNvPr id="96" name="Google Shape;96;p17"/>
           <p:cNvCxnSpPr>
+            <a:cxnSpLocks/>
             <a:stCxn id="86" idx="3"/>
-            <a:endCxn id="94" idx="0"/>
+            <a:endCxn id="92" idx="0"/>
           </p:cNvCxnSpPr>
           <p:nvPr/>
         </p:nvCxnSpPr>
         <p:spPr>
-          <a:xfrm>
-            <a:off x="4454513" y="2437225"/>
-            <a:ext cx="1266900" cy="1119000"/>
+          <a:xfrm flipH="1">
+            <a:off x="3365350" y="2437225"/>
+            <a:ext cx="1089163" cy="1118888"/>
           </a:xfrm>
           <a:prstGeom prst="straightConnector1">
             <a:avLst/>
@@ -8330,15 +8100,16 @@
         <p:nvCxnSpPr>
           <p:cNvPr id="100" name="Google Shape;100;p17"/>
           <p:cNvCxnSpPr>
-            <a:stCxn id="94" idx="0"/>
+            <a:cxnSpLocks/>
+            <a:stCxn id="92" idx="0"/>
             <a:endCxn id="86" idx="3"/>
           </p:cNvCxnSpPr>
           <p:nvPr/>
         </p:nvCxnSpPr>
         <p:spPr>
-          <a:xfrm rot="10800000">
-            <a:off x="4454650" y="2437113"/>
-            <a:ext cx="1266900" cy="1119000"/>
+          <a:xfrm flipV="1">
+            <a:off x="3365350" y="2437225"/>
+            <a:ext cx="1089163" cy="1118888"/>
           </a:xfrm>
           <a:prstGeom prst="straightConnector1">
             <a:avLst/>
@@ -8426,12 +8197,29 @@
             <p:ph type="body" idx="1"/>
           </p:nvPr>
         </p:nvSpPr>
-        <p:spPr/>
+        <p:spPr>
+          <a:xfrm>
+            <a:off x="311700" y="4459246"/>
+            <a:ext cx="8520600" cy="478458"/>
+          </a:xfrm>
+        </p:spPr>
         <p:txBody>
-          <a:bodyPr/>
+          <a:bodyPr>
+            <a:normAutofit lnSpcReduction="10000"/>
+          </a:bodyPr>
           <a:lstStyle/>
           <a:p>
-            <a:endParaRPr lang="en-US"/>
+            <a:r>
+              <a:rPr lang="en-US" dirty="0"/>
+              <a:t>Website: </a:t>
+            </a:r>
+            <a:r>
+              <a:rPr lang="en-US" dirty="0">
+                <a:hlinkClick r:id="rId2"/>
+              </a:rPr>
+              <a:t>http://group8-final-project.s3-website-us-east-1.amazonaws.com/</a:t>
+            </a:r>
+            <a:endParaRPr lang="en-US" dirty="0"/>
           </a:p>
         </p:txBody>
       </p:sp>
